--- a/generated/Tier 1 Broker Scorecards/Alex Rue Insurance Agency, Inc_Broker_Scorecard.pptx
+++ b/generated/Tier 1 Broker Scorecards/Alex Rue Insurance Agency, Inc_Broker_Scorecard.pptx
@@ -3357,7 +3357,7 @@
                         <a:rPr sz="800">
                           <a:latin typeface="Segoe UI"/>
                         </a:rPr>
-                        <a:t>$526,778.99 / $1,015,979.07 / $711,165.34</a:t>
+                        <a:t>$526,778.99 / $1,016,156.65 / $711,342.92</a:t>
                       </a:r>
                     </a:p>
                   </a:txBody>
@@ -3394,7 +3394,7 @@
                         <a:rPr sz="900">
                           <a:latin typeface="Segoe UI"/>
                         </a:rPr>
-                        <a:t>Tier 1  |  7.24% / 15.00%</a:t>
+                        <a:t>Tier 1  |  7.14% / 15.00%</a:t>
                       </a:r>
                     </a:p>
                   </a:txBody>
@@ -3431,7 +3431,7 @@
                         <a:rPr sz="900">
                           <a:latin typeface="Segoe UI"/>
                         </a:rPr>
-                        <a:t>$737,490.59  (96.4% achieved)</a:t>
+                        <a:t>$737,490.59  (96.5% achieved)</a:t>
                       </a:r>
                     </a:p>
                   </a:txBody>
@@ -3690,7 +3690,7 @@
                         <a:rPr sz="900">
                           <a:latin typeface="Segoe UI"/>
                         </a:rPr>
-                        <a:t>Fleet Bound Premium: $521,703.48</a:t>
+                        <a:t>Fleet Bound Premium: $521,833.75</a:t>
                       </a:r>
                     </a:p>
                   </a:txBody>
@@ -3766,7 +3766,7 @@
                         <a:rPr sz="900">
                           <a:latin typeface="Segoe UI"/>
                         </a:rPr>
-                        <a:t>Non-Fleet Subs: 126  |  Binds: 8</a:t>
+                        <a:t>Non-Fleet Subs: 128  |  Binds: 8</a:t>
                       </a:r>
                     </a:p>
                   </a:txBody>
@@ -3803,7 +3803,7 @@
                         <a:rPr sz="900">
                           <a:latin typeface="Segoe UI"/>
                         </a:rPr>
-                        <a:t>Non-Fleet Bound Premium: $189,461.86</a:t>
+                        <a:t>Non-Fleet Bound Premium: $189,509.17</a:t>
                       </a:r>
                     </a:p>
                   </a:txBody>
@@ -4428,7 +4428,7 @@
                           </a:solidFill>
                           <a:latin typeface="Segoe UI"/>
                         </a:rPr>
-                        <a:t>27</a:t>
+                        <a:t>29</a:t>
                       </a:r>
                     </a:p>
                   </a:txBody>
@@ -4707,7 +4707,7 @@
                           </a:solidFill>
                           <a:latin typeface="Segoe UI"/>
                         </a:rPr>
-                        <a:t>11.1%</a:t>
+                        <a:t>10.3%</a:t>
                       </a:r>
                     </a:p>
                   </a:txBody>
@@ -5256,7 +5256,7 @@
                           </a:solidFill>
                           <a:latin typeface="Segoe UI"/>
                         </a:rPr>
-                        <a:t>$62.4K</a:t>
+                        <a:t>$62.6K</a:t>
                       </a:r>
                     </a:p>
                   </a:txBody>

--- a/generated/Tier 1 Broker Scorecards/Alex Rue Insurance Agency, Inc_Broker_Scorecard.pptx
+++ b/generated/Tier 1 Broker Scorecards/Alex Rue Insurance Agency, Inc_Broker_Scorecard.pptx
@@ -3394,7 +3394,7 @@
                         <a:rPr sz="900">
                           <a:latin typeface="Segoe UI"/>
                         </a:rPr>
-                        <a:t>Tier 1  |  7.14% / 15.00%</a:t>
+                        <a:t>Tier 1  |  7.01% / 15.00%</a:t>
                       </a:r>
                     </a:p>
                   </a:txBody>
@@ -3766,7 +3766,7 @@
                         <a:rPr sz="900">
                           <a:latin typeface="Segoe UI"/>
                         </a:rPr>
-                        <a:t>Non-Fleet Subs: 128  |  Binds: 8</a:t>
+                        <a:t>Non-Fleet Subs: 131  |  Binds: 8</a:t>
                       </a:r>
                     </a:p>
                   </a:txBody>
@@ -4428,7 +4428,7 @@
                           </a:solidFill>
                           <a:latin typeface="Segoe UI"/>
                         </a:rPr>
-                        <a:t>29</a:t>
+                        <a:t>32</a:t>
                       </a:r>
                     </a:p>
                   </a:txBody>
@@ -4707,7 +4707,7 @@
                           </a:solidFill>
                           <a:latin typeface="Segoe UI"/>
                         </a:rPr>
-                        <a:t>10.3%</a:t>
+                        <a:t>9.4%</a:t>
                       </a:r>
                     </a:p>
                   </a:txBody>

--- a/generated/Tier 1 Broker Scorecards/Alex Rue Insurance Agency, Inc_Broker_Scorecard.pptx
+++ b/generated/Tier 1 Broker Scorecards/Alex Rue Insurance Agency, Inc_Broker_Scorecard.pptx
@@ -3394,7 +3394,7 @@
                         <a:rPr sz="900">
                           <a:latin typeface="Segoe UI"/>
                         </a:rPr>
-                        <a:t>Tier 1  |  7.01% / 15.00%</a:t>
+                        <a:t>Tier 1  |  7.59% / 15.00%</a:t>
                       </a:r>
                     </a:p>
                   </a:txBody>
@@ -3653,7 +3653,7 @@
                         <a:rPr sz="900">
                           <a:latin typeface="Segoe UI"/>
                         </a:rPr>
-                        <a:t>Fleet Subs: 26  |  Binds: 3</a:t>
+                        <a:t>Fleet Subs: 26  |  Binds: 4</a:t>
                       </a:r>
                     </a:p>
                   </a:txBody>
@@ -3690,7 +3690,7 @@
                         <a:rPr sz="900">
                           <a:latin typeface="Segoe UI"/>
                         </a:rPr>
-                        <a:t>Fleet Bound Premium: $521,833.75</a:t>
+                        <a:t>Fleet Bound Premium: $562,918.02</a:t>
                       </a:r>
                     </a:p>
                   </a:txBody>
@@ -3727,7 +3727,7 @@
                         <a:rPr sz="900">
                           <a:latin typeface="Segoe UI"/>
                         </a:rPr>
-                        <a:t>Fleet Book %: 73.4%</a:t>
+                        <a:t>Fleet Book %: 79.1%</a:t>
                       </a:r>
                     </a:p>
                   </a:txBody>
@@ -3766,7 +3766,7 @@
                         <a:rPr sz="900">
                           <a:latin typeface="Segoe UI"/>
                         </a:rPr>
-                        <a:t>Non-Fleet Subs: 131  |  Binds: 8</a:t>
+                        <a:t>Non-Fleet Subs: 132  |  Binds: 8</a:t>
                       </a:r>
                     </a:p>
                   </a:txBody>
@@ -3803,7 +3803,7 @@
                         <a:rPr sz="900">
                           <a:latin typeface="Segoe UI"/>
                         </a:rPr>
-                        <a:t>Non-Fleet Bound Premium: $189,509.17</a:t>
+                        <a:t>Non-Fleet Bound Premium: $148,424.90</a:t>
                       </a:r>
                     </a:p>
                   </a:txBody>
@@ -3840,7 +3840,7 @@
                         <a:rPr sz="900">
                           <a:latin typeface="Segoe UI"/>
                         </a:rPr>
-                        <a:t>Non-Fleet Book %: 26.6%</a:t>
+                        <a:t>Non-Fleet Book %: 20.9%</a:t>
                       </a:r>
                     </a:p>
                   </a:txBody>
@@ -4428,7 +4428,7 @@
                           </a:solidFill>
                           <a:latin typeface="Segoe UI"/>
                         </a:rPr>
-                        <a:t>32</a:t>
+                        <a:t>33</a:t>
                       </a:r>
                     </a:p>
                   </a:txBody>
@@ -4707,7 +4707,7 @@
                           </a:solidFill>
                           <a:latin typeface="Segoe UI"/>
                         </a:rPr>
-                        <a:t>9.4%</a:t>
+                        <a:t>12.1%</a:t>
                       </a:r>
                     </a:p>
                   </a:txBody>
@@ -4978,9 +4978,12 @@
                       <a:pPr algn="ctr"/>
                       <a:r>
                         <a:rPr sz="800">
+                          <a:solidFill>
+                            <a:srgbClr val="059669"/>
+                          </a:solidFill>
                           <a:latin typeface="Segoe UI"/>
                         </a:rPr>
-                        <a:t>3</a:t>
+                        <a:t>4</a:t>
                       </a:r>
                     </a:p>
                   </a:txBody>

--- a/generated/Tier 1 Broker Scorecards/Alex Rue Insurance Agency, Inc_Broker_Scorecard.pptx
+++ b/generated/Tier 1 Broker Scorecards/Alex Rue Insurance Agency, Inc_Broker_Scorecard.pptx
@@ -3690,7 +3690,7 @@
                         <a:rPr sz="900">
                           <a:latin typeface="Segoe UI"/>
                         </a:rPr>
-                        <a:t>Fleet Bound Premium: $562,918.02</a:t>
+                        <a:t>Fleet Bound Premium: $569,466.54</a:t>
                       </a:r>
                     </a:p>
                   </a:txBody>
@@ -3727,7 +3727,7 @@
                         <a:rPr sz="900">
                           <a:latin typeface="Segoe UI"/>
                         </a:rPr>
-                        <a:t>Fleet Book %: 79.1%</a:t>
+                        <a:t>Fleet Book %: 80.1%</a:t>
                       </a:r>
                     </a:p>
                   </a:txBody>
@@ -3803,7 +3803,7 @@
                         <a:rPr sz="900">
                           <a:latin typeface="Segoe UI"/>
                         </a:rPr>
-                        <a:t>Non-Fleet Bound Premium: $148,424.90</a:t>
+                        <a:t>Non-Fleet Bound Premium: $141,876.38</a:t>
                       </a:r>
                     </a:p>
                   </a:txBody>
@@ -3840,7 +3840,7 @@
                         <a:rPr sz="900">
                           <a:latin typeface="Segoe UI"/>
                         </a:rPr>
-                        <a:t>Non-Fleet Book %: 20.9%</a:t>
+                        <a:t>Non-Fleet Book %: 19.9%</a:t>
                       </a:r>
                     </a:p>
                   </a:txBody>
@@ -4707,7 +4707,7 @@
                           </a:solidFill>
                           <a:latin typeface="Segoe UI"/>
                         </a:rPr>
-                        <a:t>12.1%</a:t>
+                        <a:t>9.1%</a:t>
                       </a:r>
                     </a:p>
                   </a:txBody>
@@ -4978,12 +4978,9 @@
                       <a:pPr algn="ctr"/>
                       <a:r>
                         <a:rPr sz="800">
-                          <a:solidFill>
-                            <a:srgbClr val="059669"/>
-                          </a:solidFill>
                           <a:latin typeface="Segoe UI"/>
                         </a:rPr>
-                        <a:t>4</a:t>
+                        <a:t>3</a:t>
                       </a:r>
                     </a:p>
                   </a:txBody>

--- a/generated/Tier 1 Broker Scorecards/Alex Rue Insurance Agency, Inc_Broker_Scorecard.pptx
+++ b/generated/Tier 1 Broker Scorecards/Alex Rue Insurance Agency, Inc_Broker_Scorecard.pptx
@@ -3394,7 +3394,7 @@
                         <a:rPr sz="900">
                           <a:latin typeface="Segoe UI"/>
                         </a:rPr>
-                        <a:t>Tier 1  |  7.59% / 15.00%</a:t>
+                        <a:t>Tier 1  |  7.55% / 15.00%</a:t>
                       </a:r>
                     </a:p>
                   </a:txBody>
@@ -3766,7 +3766,7 @@
                         <a:rPr sz="900">
                           <a:latin typeface="Segoe UI"/>
                         </a:rPr>
-                        <a:t>Non-Fleet Subs: 132  |  Binds: 8</a:t>
+                        <a:t>Non-Fleet Subs: 133  |  Binds: 8</a:t>
                       </a:r>
                     </a:p>
                   </a:txBody>
@@ -4428,7 +4428,7 @@
                           </a:solidFill>
                           <a:latin typeface="Segoe UI"/>
                         </a:rPr>
-                        <a:t>33</a:t>
+                        <a:t>34</a:t>
                       </a:r>
                     </a:p>
                   </a:txBody>
@@ -4707,7 +4707,7 @@
                           </a:solidFill>
                           <a:latin typeface="Segoe UI"/>
                         </a:rPr>
-                        <a:t>9.1%</a:t>
+                        <a:t>8.8%</a:t>
                       </a:r>
                     </a:p>
                   </a:txBody>

--- a/generated/Tier 1 Broker Scorecards/Alex Rue Insurance Agency, Inc_Broker_Scorecard.pptx
+++ b/generated/Tier 1 Broker Scorecards/Alex Rue Insurance Agency, Inc_Broker_Scorecard.pptx
@@ -3357,7 +3357,7 @@
                         <a:rPr sz="800">
                           <a:latin typeface="Segoe UI"/>
                         </a:rPr>
-                        <a:t>$526,778.99 / $1,016,156.65 / $711,342.92</a:t>
+                        <a:t>$526,778.99 / $1,033,924.79 / $729,111.06</a:t>
                       </a:r>
                     </a:p>
                   </a:txBody>
@@ -3394,7 +3394,7 @@
                         <a:rPr sz="900">
                           <a:latin typeface="Segoe UI"/>
                         </a:rPr>
-                        <a:t>Tier 1  |  7.55% / 15.00%</a:t>
+                        <a:t>Tier 1  |  8.12% / 15.00%</a:t>
                       </a:r>
                     </a:p>
                   </a:txBody>
@@ -3431,7 +3431,7 @@
                         <a:rPr sz="900">
                           <a:latin typeface="Segoe UI"/>
                         </a:rPr>
-                        <a:t>$737,490.59  (96.5% achieved)</a:t>
+                        <a:t>$737,490.59  (98.9% achieved)</a:t>
                       </a:r>
                     </a:p>
                   </a:txBody>
@@ -3690,7 +3690,7 @@
                         <a:rPr sz="900">
                           <a:latin typeface="Segoe UI"/>
                         </a:rPr>
-                        <a:t>Fleet Bound Premium: $569,466.54</a:t>
+                        <a:t>Fleet Bound Premium: $569,566.90</a:t>
                       </a:r>
                     </a:p>
                   </a:txBody>
@@ -3727,7 +3727,7 @@
                         <a:rPr sz="900">
                           <a:latin typeface="Segoe UI"/>
                         </a:rPr>
-                        <a:t>Fleet Book %: 80.1%</a:t>
+                        <a:t>Fleet Book %: 78.1%</a:t>
                       </a:r>
                     </a:p>
                   </a:txBody>
@@ -3766,7 +3766,7 @@
                         <a:rPr sz="900">
                           <a:latin typeface="Segoe UI"/>
                         </a:rPr>
-                        <a:t>Non-Fleet Subs: 133  |  Binds: 8</a:t>
+                        <a:t>Non-Fleet Subs: 134  |  Binds: 9</a:t>
                       </a:r>
                     </a:p>
                   </a:txBody>
@@ -3803,7 +3803,7 @@
                         <a:rPr sz="900">
                           <a:latin typeface="Segoe UI"/>
                         </a:rPr>
-                        <a:t>Non-Fleet Bound Premium: $141,876.38</a:t>
+                        <a:t>Non-Fleet Bound Premium: $159,544.16</a:t>
                       </a:r>
                     </a:p>
                   </a:txBody>
@@ -3840,7 +3840,7 @@
                         <a:rPr sz="900">
                           <a:latin typeface="Segoe UI"/>
                         </a:rPr>
-                        <a:t>Non-Fleet Book %: 19.9%</a:t>
+                        <a:t>Non-Fleet Book %: 21.9%</a:t>
                       </a:r>
                     </a:p>
                   </a:txBody>
@@ -4428,7 +4428,7 @@
                           </a:solidFill>
                           <a:latin typeface="Segoe UI"/>
                         </a:rPr>
-                        <a:t>34</a:t>
+                        <a:t>35</a:t>
                       </a:r>
                     </a:p>
                   </a:txBody>
@@ -4707,7 +4707,7 @@
                           </a:solidFill>
                           <a:latin typeface="Segoe UI"/>
                         </a:rPr>
-                        <a:t>8.8%</a:t>
+                        <a:t>11.4%</a:t>
                       </a:r>
                     </a:p>
                   </a:txBody>
@@ -4978,9 +4978,12 @@
                       <a:pPr algn="ctr"/>
                       <a:r>
                         <a:rPr sz="800">
+                          <a:solidFill>
+                            <a:srgbClr val="059669"/>
+                          </a:solidFill>
                           <a:latin typeface="Segoe UI"/>
                         </a:rPr>
-                        <a:t>3</a:t>
+                        <a:t>4</a:t>
                       </a:r>
                     </a:p>
                   </a:txBody>
@@ -5252,11 +5255,11 @@
                       <a:r>
                         <a:rPr sz="800" b="1">
                           <a:solidFill>
-                            <a:srgbClr val="DC2626"/>
+                            <a:srgbClr val="059669"/>
                           </a:solidFill>
                           <a:latin typeface="Segoe UI"/>
                         </a:rPr>
-                        <a:t>$62.6K</a:t>
+                        <a:t>$80.4K</a:t>
                       </a:r>
                     </a:p>
                   </a:txBody>

--- a/generated/Tier 1 Broker Scorecards/Alex Rue Insurance Agency, Inc_Broker_Scorecard.pptx
+++ b/generated/Tier 1 Broker Scorecards/Alex Rue Insurance Agency, Inc_Broker_Scorecard.pptx
@@ -3690,7 +3690,7 @@
                         <a:rPr sz="900">
                           <a:latin typeface="Segoe UI"/>
                         </a:rPr>
-                        <a:t>Fleet Bound Premium: $569,566.90</a:t>
+                        <a:t>Fleet Bound Premium: $562,389.10</a:t>
                       </a:r>
                     </a:p>
                   </a:txBody>
@@ -3727,7 +3727,7 @@
                         <a:rPr sz="900">
                           <a:latin typeface="Segoe UI"/>
                         </a:rPr>
-                        <a:t>Fleet Book %: 78.1%</a:t>
+                        <a:t>Fleet Book %: 77.1%</a:t>
                       </a:r>
                     </a:p>
                   </a:txBody>
@@ -3803,7 +3803,7 @@
                         <a:rPr sz="900">
                           <a:latin typeface="Segoe UI"/>
                         </a:rPr>
-                        <a:t>Non-Fleet Bound Premium: $159,544.16</a:t>
+                        <a:t>Non-Fleet Bound Premium: $166,721.96</a:t>
                       </a:r>
                     </a:p>
                   </a:txBody>
@@ -3840,7 +3840,7 @@
                         <a:rPr sz="900">
                           <a:latin typeface="Segoe UI"/>
                         </a:rPr>
-                        <a:t>Non-Fleet Book %: 21.9%</a:t>
+                        <a:t>Non-Fleet Book %: 22.9%</a:t>
                       </a:r>
                     </a:p>
                   </a:txBody>
@@ -4703,11 +4703,11 @@
                       <a:r>
                         <a:rPr sz="800">
                           <a:solidFill>
-                            <a:srgbClr val="DC2626"/>
+                            <a:srgbClr val="059669"/>
                           </a:solidFill>
                           <a:latin typeface="Segoe UI"/>
                         </a:rPr>
-                        <a:t>11.4%</a:t>
+                        <a:t>14.3%</a:t>
                       </a:r>
                     </a:p>
                   </a:txBody>
@@ -4983,7 +4983,7 @@
                           </a:solidFill>
                           <a:latin typeface="Segoe UI"/>
                         </a:rPr>
-                        <a:t>4</a:t>
+                        <a:t>5</a:t>
                       </a:r>
                     </a:p>
                   </a:txBody>

--- a/generated/Tier 1 Broker Scorecards/Alex Rue Insurance Agency, Inc_Broker_Scorecard.pptx
+++ b/generated/Tier 1 Broker Scorecards/Alex Rue Insurance Agency, Inc_Broker_Scorecard.pptx
@@ -3357,7 +3357,7 @@
                         <a:rPr sz="800">
                           <a:latin typeface="Segoe UI"/>
                         </a:rPr>
-                        <a:t>$526,778.99 / $1,033,924.79 / $729,111.06</a:t>
+                        <a:t>$526,778.99 / $955,280.21 / $729,111.06</a:t>
                       </a:r>
                     </a:p>
                   </a:txBody>
@@ -3690,7 +3690,7 @@
                         <a:rPr sz="900">
                           <a:latin typeface="Segoe UI"/>
                         </a:rPr>
-                        <a:t>Fleet Bound Premium: $562,389.10</a:t>
+                        <a:t>Fleet Bound Premium: $569,566.90</a:t>
                       </a:r>
                     </a:p>
                   </a:txBody>
@@ -3727,7 +3727,7 @@
                         <a:rPr sz="900">
                           <a:latin typeface="Segoe UI"/>
                         </a:rPr>
-                        <a:t>Fleet Book %: 77.1%</a:t>
+                        <a:t>Fleet Book %: 78.1%</a:t>
                       </a:r>
                     </a:p>
                   </a:txBody>
@@ -3803,7 +3803,7 @@
                         <a:rPr sz="900">
                           <a:latin typeface="Segoe UI"/>
                         </a:rPr>
-                        <a:t>Non-Fleet Bound Premium: $166,721.96</a:t>
+                        <a:t>Non-Fleet Bound Premium: $159,544.16</a:t>
                       </a:r>
                     </a:p>
                   </a:txBody>
@@ -3840,7 +3840,7 @@
                         <a:rPr sz="900">
                           <a:latin typeface="Segoe UI"/>
                         </a:rPr>
-                        <a:t>Non-Fleet Book %: 22.9%</a:t>
+                        <a:t>Non-Fleet Book %: 21.9%</a:t>
                       </a:r>
                     </a:p>
                   </a:txBody>
@@ -4703,11 +4703,11 @@
                       <a:r>
                         <a:rPr sz="800">
                           <a:solidFill>
-                            <a:srgbClr val="059669"/>
+                            <a:srgbClr val="DC2626"/>
                           </a:solidFill>
                           <a:latin typeface="Segoe UI"/>
                         </a:rPr>
-                        <a:t>14.3%</a:t>
+                        <a:t>11.4%</a:t>
                       </a:r>
                     </a:p>
                   </a:txBody>
@@ -4983,7 +4983,7 @@
                           </a:solidFill>
                           <a:latin typeface="Segoe UI"/>
                         </a:rPr>
-                        <a:t>5</a:t>
+                        <a:t>4</a:t>
                       </a:r>
                     </a:p>
                   </a:txBody>
